--- a/tests/quality/fixtures/portability/templates/portability-two-master.pptx
+++ b/tests/quality/fixtures/portability/templates/portability-two-master.pptx
@@ -259,7 +259,7 @@
         <p:spPr>
           <a:xfrm>
             <a:off x="1889760" y="1697831"/>
-            <a:ext cx="4145280" cy="4046744"/>
+            <a:ext cx="4096512" cy="4046744"/>
           </a:xfrm>
         </p:spPr>
         <p:txBody>
@@ -293,8 +293,8 @@
         </p:nvSpPr>
         <p:spPr>
           <a:xfrm>
-            <a:off x="6156960" y="1697831"/>
-            <a:ext cx="4145280" cy="4046744"/>
+            <a:off x="6205728" y="1697831"/>
+            <a:ext cx="4096512" cy="4046744"/>
           </a:xfrm>
         </p:spPr>
         <p:txBody>
@@ -732,7 +732,7 @@
         <p:spPr>
           <a:xfrm>
             <a:off x="838200" y="1825625"/>
-            <a:ext cx="5181600" cy="4351338"/>
+            <a:ext cx="5120640" cy="4351338"/>
           </a:xfrm>
         </p:spPr>
         <p:txBody>
@@ -766,8 +766,8 @@
         </p:nvSpPr>
         <p:spPr>
           <a:xfrm>
-            <a:off x="6172200" y="1825625"/>
-            <a:ext cx="5181600" cy="4351338"/>
+            <a:off x="6233160" y="1825625"/>
+            <a:ext cx="5120640" cy="4351338"/>
           </a:xfrm>
         </p:spPr>
         <p:txBody>

--- a/tests/quality/fixtures/portability/templates/portability-two-master.pptx
+++ b/tests/quality/fixtures/portability/templates/portability-two-master.pptx
@@ -449,8 +449,8 @@
         </p:nvSpPr>
         <p:spPr>
           <a:xfrm>
-            <a:off x="2407920" y="637794"/>
-            <a:ext cx="7589520" cy="1721453"/>
+            <a:off x="2438400" y="1043798"/>
+            <a:ext cx="7315200" cy="2220468"/>
           </a:xfrm>
         </p:spPr>
         <p:txBody>
@@ -483,8 +483,8 @@
         </p:nvSpPr>
         <p:spPr>
           <a:xfrm>
-            <a:off x="2407920" y="2480310"/>
-            <a:ext cx="7589520" cy="1275588"/>
+            <a:off x="2438400" y="3349895"/>
+            <a:ext cx="7315200" cy="1539859"/>
           </a:xfrm>
         </p:spPr>
         <p:txBody>
@@ -922,8 +922,8 @@
         </p:nvSpPr>
         <p:spPr>
           <a:xfrm>
-            <a:off x="1485900" y="685800"/>
-            <a:ext cx="9486900" cy="1851025"/>
+            <a:off x="1524000" y="1122363"/>
+            <a:ext cx="9144000" cy="2387600"/>
           </a:xfrm>
         </p:spPr>
         <p:txBody>
@@ -956,8 +956,8 @@
         </p:nvSpPr>
         <p:spPr>
           <a:xfrm>
-            <a:off x="1485900" y="2667000"/>
-            <a:ext cx="9486900" cy="1371600"/>
+            <a:off x="1524000" y="3602038"/>
+            <a:ext cx="9144000" cy="1655762"/>
           </a:xfrm>
         </p:spPr>
         <p:txBody>
